--- a/yellowknife-aurora.pptx
+++ b/yellowknife-aurora.pptx
@@ -1596,10 +1596,11 @@
           <a:p>
             <a:r>
               <a:rPr lang="en-US" dirty="0"/>
-              <a:t>원리 설명은 40초 이내.
-태양풍 → 자기장 → 극지방 → 대기와 충돌 → 빛.
-색은 기체와 높이: 산소 초록/빨강, 질소 보라·파랑.
-"지금이 가기 좋은 때"라는 정보로 마무리: 2024~2026 극대기.</a:t>
+              <a:t>40초 이내.
+"네온사인 원리와 같습니다. 유리관 속 기체에 전기를 흘리면 빛나죠. 오로라는 전기 대신 태양이 스위치입니다."
+1 태양이 쏘고 → 2 지구가 극지방으로 모으고 → 3 공기에 부딪혀 빛난다.
+색: 네온사인이 기체마다 색이 다르듯, 산소는 초록(낮은 곳)과 빨강(높은 곳), 질소는 보라·파랑.
+마지막: 2024~2026 태양 극대기라 지금이 가기 좋은 때.</a:t>
             </a:r>
             <a:endParaRPr lang="en-US" dirty="0"/>
           </a:p>
@@ -8385,7 +8386,7 @@
                 <a:ea typeface="Malgun Gothic" pitchFamily="34" charset="-122"/>
                 <a:cs typeface="Malgun Gothic" pitchFamily="34" charset="-120"/>
               </a:rPr>
-              <a:t>태양이 지구를 건드려서 생기는 빛</a:t>
+              <a:t>하늘에 켜진 거대한 네온사인</a:t>
             </a:r>
             <a:endParaRPr lang="en-US" sz="3000" dirty="0"/>
           </a:p>
@@ -8393,24 +8394,67 @@
       </p:sp>
       <p:sp>
         <p:nvSpPr>
-          <p:cNvPr id="5" name="Shape 3"/>
+          <p:cNvPr id="5" name="Text 3"/>
+          <p:cNvSpPr txBox="1"/>
+          <p:nvPr/>
+        </p:nvSpPr>
+        <p:spPr>
+          <a:xfrm>
+            <a:off x="731520" y="1280160"/>
+            <a:ext cx="10725912" cy="457200"/>
+          </a:xfrm>
+          <a:prstGeom prst="rect">
+            <a:avLst/>
+          </a:prstGeom>
+          <a:noFill/>
+          <a:ln/>
+        </p:spPr>
+        <p:txBody>
+          <a:bodyPr wrap="square" lIns="0" tIns="0" rIns="0" bIns="0" rtlCol="0" anchor="ctr"/>
+          <a:lstStyle/>
+          <a:p>
+            <a:pPr indent="0" marL="0">
+              <a:buNone/>
+            </a:pPr>
+            <a:r>
+              <a:rPr lang="en-US" sz="1400" dirty="0">
+                <a:solidFill>
+                  <a:srgbClr val="A9B4C2"/>
+                </a:solidFill>
+                <a:latin typeface="Malgun Gothic" pitchFamily="34" charset="0"/>
+                <a:ea typeface="Malgun Gothic" pitchFamily="34" charset="-122"/>
+                <a:cs typeface="Malgun Gothic" pitchFamily="34" charset="-120"/>
+              </a:rPr>
+              <a:t>네온사인은 유리관 속 기체에 전기를 흘리면 기체가 빛을 냅니다. 오로라도 같습니다. 전기 대신 태양이 스위치일 뿐입니다.</a:t>
+            </a:r>
+            <a:endParaRPr lang="en-US" sz="1400" dirty="0"/>
+          </a:p>
+        </p:txBody>
+      </p:sp>
+      <p:sp>
+        <p:nvSpPr>
+          <p:cNvPr id="6" name="Shape 4"/>
           <p:cNvSpPr/>
           <p:nvPr/>
         </p:nvSpPr>
         <p:spPr>
           <a:xfrm>
-            <a:off x="1097280" y="2103120"/>
-            <a:ext cx="1463040" cy="1463040"/>
-          </a:xfrm>
-          <a:prstGeom prst="ellipse">
-            <a:avLst/>
+            <a:off x="731520" y="1965960"/>
+            <a:ext cx="3246120" cy="2057400"/>
+          </a:xfrm>
+          <a:prstGeom prst="roundRect">
+            <a:avLst>
+              <a:gd name="adj" fmla="val 2667"/>
+            </a:avLst>
           </a:prstGeom>
           <a:solidFill>
-            <a:srgbClr val="F2C46B"/>
+            <a:srgbClr val="FFFFFF">
+              <a:alpha val="7000"/>
+            </a:srgbClr>
           </a:solidFill>
-          <a:ln w="12700">
+          <a:ln w="6350">
             <a:solidFill>
-              <a:srgbClr val="F2C46B"/>
+              <a:srgbClr val="2A3A55"/>
             </a:solidFill>
             <a:prstDash val="solid"/>
           </a:ln>
@@ -8418,14 +8462,154 @@
       </p:sp>
       <p:sp>
         <p:nvSpPr>
-          <p:cNvPr id="6" name="Text 4"/>
-          <p:cNvSpPr txBox="1"/>
-          <p:nvPr/>
-        </p:nvSpPr>
-        <p:spPr>
-          <a:xfrm>
-            <a:off x="1097280" y="3657600"/>
-            <a:ext cx="1463040" cy="320040"/>
+          <p:cNvPr id="7" name="Text 5"/>
+          <p:cNvSpPr txBox="1"/>
+          <p:nvPr/>
+        </p:nvSpPr>
+        <p:spPr>
+          <a:xfrm>
+            <a:off x="1005840" y="2103120"/>
+            <a:ext cx="548640" cy="548640"/>
+          </a:xfrm>
+          <a:prstGeom prst="rect">
+            <a:avLst/>
+          </a:prstGeom>
+          <a:noFill/>
+          <a:ln/>
+        </p:spPr>
+        <p:txBody>
+          <a:bodyPr wrap="square" lIns="0" tIns="0" rIns="0" bIns="0" rtlCol="0" anchor="ctr"/>
+          <a:lstStyle/>
+          <a:p>
+            <a:pPr indent="0" marL="0">
+              <a:buNone/>
+            </a:pPr>
+            <a:r>
+              <a:rPr lang="en-US" sz="2600" dirty="0">
+                <a:solidFill>
+                  <a:srgbClr val="4FA88A"/>
+                </a:solidFill>
+                <a:latin typeface="Malgun Gothic" pitchFamily="34" charset="0"/>
+                <a:ea typeface="Malgun Gothic" pitchFamily="34" charset="-122"/>
+                <a:cs typeface="Malgun Gothic" pitchFamily="34" charset="-120"/>
+              </a:rPr>
+              <a:t>1</a:t>
+            </a:r>
+            <a:endParaRPr lang="en-US" sz="2600" dirty="0"/>
+          </a:p>
+        </p:txBody>
+      </p:sp>
+      <p:sp>
+        <p:nvSpPr>
+          <p:cNvPr id="8" name="Text 6"/>
+          <p:cNvSpPr txBox="1"/>
+          <p:nvPr/>
+        </p:nvSpPr>
+        <p:spPr>
+          <a:xfrm>
+            <a:off x="1005840" y="2697480"/>
+            <a:ext cx="2697480" cy="411480"/>
+          </a:xfrm>
+          <a:prstGeom prst="rect">
+            <a:avLst/>
+          </a:prstGeom>
+          <a:noFill/>
+          <a:ln/>
+        </p:spPr>
+        <p:txBody>
+          <a:bodyPr wrap="square" lIns="0" tIns="0" rIns="0" bIns="0" rtlCol="0" anchor="ctr"/>
+          <a:lstStyle/>
+          <a:p>
+            <a:pPr indent="0" marL="0">
+              <a:buNone/>
+            </a:pPr>
+            <a:r>
+              <a:rPr lang="en-US" sz="1600" b="1" dirty="0">
+                <a:solidFill>
+                  <a:srgbClr val="F4F6F8"/>
+                </a:solidFill>
+                <a:latin typeface="Malgun Gothic" pitchFamily="34" charset="0"/>
+                <a:ea typeface="Malgun Gothic" pitchFamily="34" charset="-122"/>
+                <a:cs typeface="Malgun Gothic" pitchFamily="34" charset="-120"/>
+              </a:rPr>
+              <a:t>태양이 입자를 쏜다</a:t>
+            </a:r>
+            <a:endParaRPr lang="en-US" sz="1600" dirty="0"/>
+          </a:p>
+        </p:txBody>
+      </p:sp>
+      <p:sp>
+        <p:nvSpPr>
+          <p:cNvPr id="9" name="Text 7"/>
+          <p:cNvSpPr txBox="1"/>
+          <p:nvPr/>
+        </p:nvSpPr>
+        <p:spPr>
+          <a:xfrm>
+            <a:off x="1005840" y="3154680"/>
+            <a:ext cx="2697480" cy="777240"/>
+          </a:xfrm>
+          <a:prstGeom prst="rect">
+            <a:avLst/>
+          </a:prstGeom>
+          <a:noFill/>
+          <a:ln/>
+        </p:spPr>
+        <p:txBody>
+          <a:bodyPr wrap="square" lIns="0" tIns="0" rIns="0" bIns="0" rtlCol="0" anchor="ctr"/>
+          <a:lstStyle/>
+          <a:p>
+            <a:pPr indent="0" marL="0">
+              <a:lnSpc>
+                <a:spcPct val="130000"/>
+              </a:lnSpc>
+              <a:buNone/>
+            </a:pPr>
+            <a:r>
+              <a:rPr lang="en-US" sz="1200" dirty="0">
+                <a:solidFill>
+                  <a:srgbClr val="A9B4C2"/>
+                </a:solidFill>
+                <a:latin typeface="Malgun Gothic" pitchFamily="34" charset="0"/>
+                <a:ea typeface="Malgun Gothic" pitchFamily="34" charset="-122"/>
+                <a:cs typeface="Malgun Gothic" pitchFamily="34" charset="-120"/>
+              </a:rPr>
+              <a:t>태양에서 전기를 띤 알갱이가</a:t>
+            </a:r>
+            <a:endParaRPr lang="en-US" sz="1200" dirty="0"/>
+          </a:p>
+          <a:p>
+            <a:pPr indent="0" marL="0">
+              <a:lnSpc>
+                <a:spcPct val="130000"/>
+              </a:lnSpc>
+              <a:buNone/>
+            </a:pPr>
+            <a:r>
+              <a:rPr lang="en-US" sz="1200" dirty="0">
+                <a:solidFill>
+                  <a:srgbClr val="A9B4C2"/>
+                </a:solidFill>
+                <a:latin typeface="Malgun Gothic" pitchFamily="34" charset="0"/>
+                <a:ea typeface="Malgun Gothic" pitchFamily="34" charset="-122"/>
+                <a:cs typeface="Malgun Gothic" pitchFamily="34" charset="-120"/>
+              </a:rPr>
+              <a:t>지구 쪽으로 날아옵니다</a:t>
+            </a:r>
+            <a:endParaRPr lang="en-US" sz="1200" dirty="0"/>
+          </a:p>
+        </p:txBody>
+      </p:sp>
+      <p:sp>
+        <p:nvSpPr>
+          <p:cNvPr id="10" name="Text 8"/>
+          <p:cNvSpPr txBox="1"/>
+          <p:nvPr/>
+        </p:nvSpPr>
+        <p:spPr>
+          <a:xfrm>
+            <a:off x="3977640" y="2697480"/>
+            <a:ext cx="365760" cy="457200"/>
           </a:xfrm>
           <a:prstGeom prst="rect">
             <a:avLst/>
@@ -8441,128 +8625,17 @@
               <a:buNone/>
             </a:pPr>
             <a:r>
-              <a:rPr lang="en-US" sz="1300" dirty="0">
-                <a:solidFill>
-                  <a:srgbClr val="A9B4C2"/>
-                </a:solidFill>
-                <a:latin typeface="Malgun Gothic" pitchFamily="34" charset="0"/>
-                <a:ea typeface="Malgun Gothic" pitchFamily="34" charset="-122"/>
-                <a:cs typeface="Malgun Gothic" pitchFamily="34" charset="-120"/>
-              </a:rPr>
-              <a:t>태양</a:t>
-            </a:r>
-            <a:endParaRPr lang="en-US" sz="1300" dirty="0"/>
-          </a:p>
-        </p:txBody>
-      </p:sp>
-      <p:sp>
-        <p:nvSpPr>
-          <p:cNvPr id="7" name="Shape 5"/>
-          <p:cNvSpPr/>
-          <p:nvPr/>
-        </p:nvSpPr>
-        <p:spPr>
-          <a:xfrm>
-            <a:off x="2926080" y="2514600"/>
-            <a:ext cx="2011680" cy="0"/>
-          </a:xfrm>
-          <a:prstGeom prst="line">
-            <a:avLst/>
-          </a:prstGeom>
-          <a:noFill/>
-          <a:ln w="15875">
-            <a:solidFill>
-              <a:srgbClr val="4FA88A"/>
-            </a:solidFill>
-            <a:prstDash val="dash"/>
-            <a:tailEnd type="triangle"/>
-          </a:ln>
-        </p:spPr>
-      </p:sp>
-      <p:sp>
-        <p:nvSpPr>
-          <p:cNvPr id="8" name="Shape 6"/>
-          <p:cNvSpPr/>
-          <p:nvPr/>
-        </p:nvSpPr>
-        <p:spPr>
-          <a:xfrm>
-            <a:off x="2926080" y="2834640"/>
-            <a:ext cx="2011680" cy="0"/>
-          </a:xfrm>
-          <a:prstGeom prst="line">
-            <a:avLst/>
-          </a:prstGeom>
-          <a:noFill/>
-          <a:ln w="15875">
-            <a:solidFill>
-              <a:srgbClr val="4FA88A"/>
-            </a:solidFill>
-            <a:prstDash val="dash"/>
-            <a:tailEnd type="triangle"/>
-          </a:ln>
-        </p:spPr>
-      </p:sp>
-      <p:sp>
-        <p:nvSpPr>
-          <p:cNvPr id="9" name="Shape 7"/>
-          <p:cNvSpPr/>
-          <p:nvPr/>
-        </p:nvSpPr>
-        <p:spPr>
-          <a:xfrm>
-            <a:off x="2926080" y="3154680"/>
-            <a:ext cx="2011680" cy="0"/>
-          </a:xfrm>
-          <a:prstGeom prst="line">
-            <a:avLst/>
-          </a:prstGeom>
-          <a:noFill/>
-          <a:ln w="15875">
-            <a:solidFill>
-              <a:srgbClr val="4FA88A"/>
-            </a:solidFill>
-            <a:prstDash val="dash"/>
-            <a:tailEnd type="triangle"/>
-          </a:ln>
-        </p:spPr>
-      </p:sp>
-      <p:sp>
-        <p:nvSpPr>
-          <p:cNvPr id="10" name="Text 8"/>
-          <p:cNvSpPr txBox="1"/>
-          <p:nvPr/>
-        </p:nvSpPr>
-        <p:spPr>
-          <a:xfrm>
-            <a:off x="2834640" y="3566160"/>
-            <a:ext cx="2286000" cy="320040"/>
-          </a:xfrm>
-          <a:prstGeom prst="rect">
-            <a:avLst/>
-          </a:prstGeom>
-          <a:noFill/>
-          <a:ln/>
-        </p:spPr>
-        <p:txBody>
-          <a:bodyPr wrap="square" lIns="0" tIns="0" rIns="0" bIns="0" rtlCol="0" anchor="ctr"/>
-          <a:lstStyle/>
-          <a:p>
-            <a:pPr algn="ctr" indent="0" marL="0">
-              <a:buNone/>
-            </a:pPr>
-            <a:r>
-              <a:rPr lang="en-US" sz="1100" dirty="0">
-                <a:solidFill>
-                  <a:srgbClr val="A9B4C2"/>
-                </a:solidFill>
-                <a:latin typeface="Malgun Gothic" pitchFamily="34" charset="0"/>
-                <a:ea typeface="Malgun Gothic" pitchFamily="34" charset="-122"/>
-                <a:cs typeface="Malgun Gothic" pitchFamily="34" charset="-120"/>
-              </a:rPr>
-              <a:t>태양풍 (전기를 띤 입자)</a:t>
-            </a:r>
-            <a:endParaRPr lang="en-US" sz="1100" dirty="0"/>
+              <a:rPr lang="en-US" sz="1800" dirty="0">
+                <a:solidFill>
+                  <a:srgbClr val="7C8899"/>
+                </a:solidFill>
+                <a:latin typeface="Malgun Gothic" pitchFamily="34" charset="0"/>
+                <a:ea typeface="Malgun Gothic" pitchFamily="34" charset="-122"/>
+                <a:cs typeface="Malgun Gothic" pitchFamily="34" charset="-120"/>
+              </a:rPr>
+              <a:t>→</a:t>
+            </a:r>
+            <a:endParaRPr lang="en-US" sz="1800" dirty="0"/>
           </a:p>
         </p:txBody>
       </p:sp>
@@ -8574,18 +8647,22 @@
         </p:nvSpPr>
         <p:spPr>
           <a:xfrm>
-            <a:off x="5394960" y="1965960"/>
-            <a:ext cx="1737360" cy="1737360"/>
-          </a:xfrm>
-          <a:prstGeom prst="ellipse">
-            <a:avLst/>
+            <a:off x="4343400" y="1965960"/>
+            <a:ext cx="3246120" cy="2057400"/>
+          </a:xfrm>
+          <a:prstGeom prst="roundRect">
+            <a:avLst>
+              <a:gd name="adj" fmla="val 2667"/>
+            </a:avLst>
           </a:prstGeom>
           <a:solidFill>
-            <a:srgbClr val="3A6EA5"/>
+            <a:srgbClr val="FFFFFF">
+              <a:alpha val="7000"/>
+            </a:srgbClr>
           </a:solidFill>
-          <a:ln w="12700">
+          <a:ln w="6350">
             <a:solidFill>
-              <a:srgbClr val="3A6EA5"/>
+              <a:srgbClr val="2A3A55"/>
             </a:solidFill>
             <a:prstDash val="solid"/>
           </a:ln>
@@ -8593,25 +8670,207 @@
       </p:sp>
       <p:sp>
         <p:nvSpPr>
-          <p:cNvPr id="12" name="Shape 10"/>
+          <p:cNvPr id="12" name="Text 10"/>
+          <p:cNvSpPr txBox="1"/>
+          <p:nvPr/>
+        </p:nvSpPr>
+        <p:spPr>
+          <a:xfrm>
+            <a:off x="4617720" y="2103120"/>
+            <a:ext cx="548640" cy="548640"/>
+          </a:xfrm>
+          <a:prstGeom prst="rect">
+            <a:avLst/>
+          </a:prstGeom>
+          <a:noFill/>
+          <a:ln/>
+        </p:spPr>
+        <p:txBody>
+          <a:bodyPr wrap="square" lIns="0" tIns="0" rIns="0" bIns="0" rtlCol="0" anchor="ctr"/>
+          <a:lstStyle/>
+          <a:p>
+            <a:pPr indent="0" marL="0">
+              <a:buNone/>
+            </a:pPr>
+            <a:r>
+              <a:rPr lang="en-US" sz="2600" dirty="0">
+                <a:solidFill>
+                  <a:srgbClr val="4FA88A"/>
+                </a:solidFill>
+                <a:latin typeface="Malgun Gothic" pitchFamily="34" charset="0"/>
+                <a:ea typeface="Malgun Gothic" pitchFamily="34" charset="-122"/>
+                <a:cs typeface="Malgun Gothic" pitchFamily="34" charset="-120"/>
+              </a:rPr>
+              <a:t>2</a:t>
+            </a:r>
+            <a:endParaRPr lang="en-US" sz="2600" dirty="0"/>
+          </a:p>
+        </p:txBody>
+      </p:sp>
+      <p:sp>
+        <p:nvSpPr>
+          <p:cNvPr id="13" name="Text 11"/>
+          <p:cNvSpPr txBox="1"/>
+          <p:nvPr/>
+        </p:nvSpPr>
+        <p:spPr>
+          <a:xfrm>
+            <a:off x="4617720" y="2697480"/>
+            <a:ext cx="2697480" cy="411480"/>
+          </a:xfrm>
+          <a:prstGeom prst="rect">
+            <a:avLst/>
+          </a:prstGeom>
+          <a:noFill/>
+          <a:ln/>
+        </p:spPr>
+        <p:txBody>
+          <a:bodyPr wrap="square" lIns="0" tIns="0" rIns="0" bIns="0" rtlCol="0" anchor="ctr"/>
+          <a:lstStyle/>
+          <a:p>
+            <a:pPr indent="0" marL="0">
+              <a:buNone/>
+            </a:pPr>
+            <a:r>
+              <a:rPr lang="en-US" sz="1600" b="1" dirty="0">
+                <a:solidFill>
+                  <a:srgbClr val="F4F6F8"/>
+                </a:solidFill>
+                <a:latin typeface="Malgun Gothic" pitchFamily="34" charset="0"/>
+                <a:ea typeface="Malgun Gothic" pitchFamily="34" charset="-122"/>
+                <a:cs typeface="Malgun Gothic" pitchFamily="34" charset="-120"/>
+              </a:rPr>
+              <a:t>지구가 극지방으로 모은다</a:t>
+            </a:r>
+            <a:endParaRPr lang="en-US" sz="1600" dirty="0"/>
+          </a:p>
+        </p:txBody>
+      </p:sp>
+      <p:sp>
+        <p:nvSpPr>
+          <p:cNvPr id="14" name="Text 12"/>
+          <p:cNvSpPr txBox="1"/>
+          <p:nvPr/>
+        </p:nvSpPr>
+        <p:spPr>
+          <a:xfrm>
+            <a:off x="4617720" y="3154680"/>
+            <a:ext cx="2697480" cy="777240"/>
+          </a:xfrm>
+          <a:prstGeom prst="rect">
+            <a:avLst/>
+          </a:prstGeom>
+          <a:noFill/>
+          <a:ln/>
+        </p:spPr>
+        <p:txBody>
+          <a:bodyPr wrap="square" lIns="0" tIns="0" rIns="0" bIns="0" rtlCol="0" anchor="ctr"/>
+          <a:lstStyle/>
+          <a:p>
+            <a:pPr indent="0" marL="0">
+              <a:lnSpc>
+                <a:spcPct val="130000"/>
+              </a:lnSpc>
+              <a:buNone/>
+            </a:pPr>
+            <a:r>
+              <a:rPr lang="en-US" sz="1200" dirty="0">
+                <a:solidFill>
+                  <a:srgbClr val="A9B4C2"/>
+                </a:solidFill>
+                <a:latin typeface="Malgun Gothic" pitchFamily="34" charset="0"/>
+                <a:ea typeface="Malgun Gothic" pitchFamily="34" charset="-122"/>
+                <a:cs typeface="Malgun Gothic" pitchFamily="34" charset="-120"/>
+              </a:rPr>
+              <a:t>지구 자기장이 그 알갱이를</a:t>
+            </a:r>
+            <a:endParaRPr lang="en-US" sz="1200" dirty="0"/>
+          </a:p>
+          <a:p>
+            <a:pPr indent="0" marL="0">
+              <a:lnSpc>
+                <a:spcPct val="130000"/>
+              </a:lnSpc>
+              <a:buNone/>
+            </a:pPr>
+            <a:r>
+              <a:rPr lang="en-US" sz="1200" dirty="0">
+                <a:solidFill>
+                  <a:srgbClr val="A9B4C2"/>
+                </a:solidFill>
+                <a:latin typeface="Malgun Gothic" pitchFamily="34" charset="0"/>
+                <a:ea typeface="Malgun Gothic" pitchFamily="34" charset="-122"/>
+                <a:cs typeface="Malgun Gothic" pitchFamily="34" charset="-120"/>
+              </a:rPr>
+              <a:t>남극과 북극 하늘로 끌어당깁니다</a:t>
+            </a:r>
+            <a:endParaRPr lang="en-US" sz="1200" dirty="0"/>
+          </a:p>
+        </p:txBody>
+      </p:sp>
+      <p:sp>
+        <p:nvSpPr>
+          <p:cNvPr id="15" name="Text 13"/>
+          <p:cNvSpPr txBox="1"/>
+          <p:nvPr/>
+        </p:nvSpPr>
+        <p:spPr>
+          <a:xfrm>
+            <a:off x="7589520" y="2697480"/>
+            <a:ext cx="365760" cy="457200"/>
+          </a:xfrm>
+          <a:prstGeom prst="rect">
+            <a:avLst/>
+          </a:prstGeom>
+          <a:noFill/>
+          <a:ln/>
+        </p:spPr>
+        <p:txBody>
+          <a:bodyPr wrap="square" lIns="0" tIns="0" rIns="0" bIns="0" rtlCol="0" anchor="ctr"/>
+          <a:lstStyle/>
+          <a:p>
+            <a:pPr algn="ctr" indent="0" marL="0">
+              <a:buNone/>
+            </a:pPr>
+            <a:r>
+              <a:rPr lang="en-US" sz="1800" dirty="0">
+                <a:solidFill>
+                  <a:srgbClr val="7C8899"/>
+                </a:solidFill>
+                <a:latin typeface="Malgun Gothic" pitchFamily="34" charset="0"/>
+                <a:ea typeface="Malgun Gothic" pitchFamily="34" charset="-122"/>
+                <a:cs typeface="Malgun Gothic" pitchFamily="34" charset="-120"/>
+              </a:rPr>
+              <a:t>→</a:t>
+            </a:r>
+            <a:endParaRPr lang="en-US" sz="1800" dirty="0"/>
+          </a:p>
+        </p:txBody>
+      </p:sp>
+      <p:sp>
+        <p:nvSpPr>
+          <p:cNvPr id="16" name="Shape 14"/>
           <p:cNvSpPr/>
           <p:nvPr/>
         </p:nvSpPr>
         <p:spPr>
           <a:xfrm>
-            <a:off x="5074920" y="1691640"/>
-            <a:ext cx="2377440" cy="2286000"/>
-          </a:xfrm>
-          <a:prstGeom prst="arc">
+            <a:off x="7955280" y="1965960"/>
+            <a:ext cx="3246120" cy="2057400"/>
+          </a:xfrm>
+          <a:prstGeom prst="roundRect">
             <a:avLst>
-              <a:gd name="adj1" fmla="val 12000000"/>
-              <a:gd name="adj2" fmla="val 20400000"/>
+              <a:gd name="adj" fmla="val 2667"/>
             </a:avLst>
           </a:prstGeom>
-          <a:noFill/>
-          <a:ln w="25400">
+          <a:solidFill>
+            <a:srgbClr val="FFFFFF">
+              <a:alpha val="7000"/>
+            </a:srgbClr>
+          </a:solidFill>
+          <a:ln w="6350">
             <a:solidFill>
-              <a:srgbClr val="7EDCB6"/>
+              <a:srgbClr val="2A3A55"/>
             </a:solidFill>
             <a:prstDash val="solid"/>
           </a:ln>
@@ -8619,59 +8878,111 @@
       </p:sp>
       <p:sp>
         <p:nvSpPr>
-          <p:cNvPr id="13" name="Shape 11"/>
-          <p:cNvSpPr/>
-          <p:nvPr/>
-        </p:nvSpPr>
-        <p:spPr>
-          <a:xfrm>
-            <a:off x="5074920" y="1691640"/>
-            <a:ext cx="2377440" cy="2286000"/>
-          </a:xfrm>
-          <a:prstGeom prst="arc">
-            <a:avLst>
-              <a:gd name="adj1" fmla="val 1200000"/>
-              <a:gd name="adj2" fmla="val 9600000"/>
-            </a:avLst>
-          </a:prstGeom>
-          <a:noFill/>
-          <a:ln w="25400">
-            <a:solidFill>
-              <a:srgbClr val="7EDCB6"/>
-            </a:solidFill>
-            <a:prstDash val="solid"/>
-          </a:ln>
-        </p:spPr>
-      </p:sp>
-      <p:sp>
-        <p:nvSpPr>
-          <p:cNvPr id="14" name="Text 12"/>
-          <p:cNvSpPr txBox="1"/>
-          <p:nvPr/>
-        </p:nvSpPr>
-        <p:spPr>
-          <a:xfrm>
-            <a:off x="4846320" y="3886200"/>
-            <a:ext cx="2834640" cy="914400"/>
-          </a:xfrm>
-          <a:prstGeom prst="rect">
-            <a:avLst/>
-          </a:prstGeom>
-          <a:noFill/>
-          <a:ln/>
-        </p:spPr>
-        <p:txBody>
-          <a:bodyPr wrap="square" lIns="0" tIns="0" rIns="0" bIns="0" rtlCol="0" anchor="ctr"/>
-          <a:lstStyle/>
-          <a:p>
-            <a:pPr algn="ctr" indent="0" marL="0">
+          <p:cNvPr id="17" name="Text 15"/>
+          <p:cNvSpPr txBox="1"/>
+          <p:nvPr/>
+        </p:nvSpPr>
+        <p:spPr>
+          <a:xfrm>
+            <a:off x="8229600" y="2103120"/>
+            <a:ext cx="548640" cy="548640"/>
+          </a:xfrm>
+          <a:prstGeom prst="rect">
+            <a:avLst/>
+          </a:prstGeom>
+          <a:noFill/>
+          <a:ln/>
+        </p:spPr>
+        <p:txBody>
+          <a:bodyPr wrap="square" lIns="0" tIns="0" rIns="0" bIns="0" rtlCol="0" anchor="ctr"/>
+          <a:lstStyle/>
+          <a:p>
+            <a:pPr indent="0" marL="0">
+              <a:buNone/>
+            </a:pPr>
+            <a:r>
+              <a:rPr lang="en-US" sz="2600" dirty="0">
+                <a:solidFill>
+                  <a:srgbClr val="4FA88A"/>
+                </a:solidFill>
+                <a:latin typeface="Malgun Gothic" pitchFamily="34" charset="0"/>
+                <a:ea typeface="Malgun Gothic" pitchFamily="34" charset="-122"/>
+                <a:cs typeface="Malgun Gothic" pitchFamily="34" charset="-120"/>
+              </a:rPr>
+              <a:t>3</a:t>
+            </a:r>
+            <a:endParaRPr lang="en-US" sz="2600" dirty="0"/>
+          </a:p>
+        </p:txBody>
+      </p:sp>
+      <p:sp>
+        <p:nvSpPr>
+          <p:cNvPr id="18" name="Text 16"/>
+          <p:cNvSpPr txBox="1"/>
+          <p:nvPr/>
+        </p:nvSpPr>
+        <p:spPr>
+          <a:xfrm>
+            <a:off x="8229600" y="2697480"/>
+            <a:ext cx="2697480" cy="411480"/>
+          </a:xfrm>
+          <a:prstGeom prst="rect">
+            <a:avLst/>
+          </a:prstGeom>
+          <a:noFill/>
+          <a:ln/>
+        </p:spPr>
+        <p:txBody>
+          <a:bodyPr wrap="square" lIns="0" tIns="0" rIns="0" bIns="0" rtlCol="0" anchor="ctr"/>
+          <a:lstStyle/>
+          <a:p>
+            <a:pPr indent="0" marL="0">
+              <a:buNone/>
+            </a:pPr>
+            <a:r>
+              <a:rPr lang="en-US" sz="1600" b="1" dirty="0">
+                <a:solidFill>
+                  <a:srgbClr val="F4F6F8"/>
+                </a:solidFill>
+                <a:latin typeface="Malgun Gothic" pitchFamily="34" charset="0"/>
+                <a:ea typeface="Malgun Gothic" pitchFamily="34" charset="-122"/>
+                <a:cs typeface="Malgun Gothic" pitchFamily="34" charset="-120"/>
+              </a:rPr>
+              <a:t>공기에 부딪혀 빛난다</a:t>
+            </a:r>
+            <a:endParaRPr lang="en-US" sz="1600" dirty="0"/>
+          </a:p>
+        </p:txBody>
+      </p:sp>
+      <p:sp>
+        <p:nvSpPr>
+          <p:cNvPr id="19" name="Text 17"/>
+          <p:cNvSpPr txBox="1"/>
+          <p:nvPr/>
+        </p:nvSpPr>
+        <p:spPr>
+          <a:xfrm>
+            <a:off x="8229600" y="3154680"/>
+            <a:ext cx="2697480" cy="777240"/>
+          </a:xfrm>
+          <a:prstGeom prst="rect">
+            <a:avLst/>
+          </a:prstGeom>
+          <a:noFill/>
+          <a:ln/>
+        </p:spPr>
+        <p:txBody>
+          <a:bodyPr wrap="square" lIns="0" tIns="0" rIns="0" bIns="0" rtlCol="0" anchor="ctr"/>
+          <a:lstStyle/>
+          <a:p>
+            <a:pPr indent="0" marL="0">
               <a:lnSpc>
                 <a:spcPct val="130000"/>
               </a:lnSpc>
               <a:buNone/>
             </a:pPr>
             <a:r>
-              <a:rPr lang="en-US" sz="1100" dirty="0">
+              <a:rPr lang="en-US" sz="1200" dirty="0">
                 <a:solidFill>
                   <a:srgbClr val="A9B4C2"/>
                 </a:solidFill>
@@ -8679,19 +8990,19 @@
                 <a:ea typeface="Malgun Gothic" pitchFamily="34" charset="-122"/>
                 <a:cs typeface="Malgun Gothic" pitchFamily="34" charset="-120"/>
               </a:rPr>
-              <a:t>지구 자기장을 따라</a:t>
-            </a:r>
-            <a:endParaRPr lang="en-US" sz="1100" dirty="0"/>
-          </a:p>
-          <a:p>
-            <a:pPr algn="ctr" indent="0" marL="0">
+              <a:t>높은 하늘의 산소와 질소가</a:t>
+            </a:r>
+            <a:endParaRPr lang="en-US" sz="1200" dirty="0"/>
+          </a:p>
+          <a:p>
+            <a:pPr indent="0" marL="0">
               <a:lnSpc>
                 <a:spcPct val="130000"/>
               </a:lnSpc>
               <a:buNone/>
             </a:pPr>
             <a:r>
-              <a:rPr lang="en-US" sz="1100" dirty="0">
+              <a:rPr lang="en-US" sz="1200" dirty="0">
                 <a:solidFill>
                   <a:srgbClr val="A9B4C2"/>
                 </a:solidFill>
@@ -8699,46 +9010,65 @@
                 <a:ea typeface="Malgun Gothic" pitchFamily="34" charset="-122"/>
                 <a:cs typeface="Malgun Gothic" pitchFamily="34" charset="-120"/>
               </a:rPr>
-              <a:t>극지방으로 끌려 들어와</a:t>
-            </a:r>
-            <a:endParaRPr lang="en-US" sz="1100" dirty="0"/>
-          </a:p>
-          <a:p>
-            <a:pPr algn="ctr" indent="0" marL="0">
-              <a:lnSpc>
-                <a:spcPct val="130000"/>
-              </a:lnSpc>
-              <a:buNone/>
-            </a:pPr>
-            <a:r>
-              <a:rPr lang="en-US" sz="1100" dirty="0">
-                <a:solidFill>
-                  <a:srgbClr val="A9B4C2"/>
-                </a:solidFill>
-                <a:latin typeface="Malgun Gothic" pitchFamily="34" charset="0"/>
-                <a:ea typeface="Malgun Gothic" pitchFamily="34" charset="-122"/>
-                <a:cs typeface="Malgun Gothic" pitchFamily="34" charset="-120"/>
-              </a:rPr>
-              <a:t>대기와 부딪히며 빛을 냅니다</a:t>
-            </a:r>
-            <a:endParaRPr lang="en-US" sz="1100" dirty="0"/>
-          </a:p>
-        </p:txBody>
-      </p:sp>
-      <p:sp>
-        <p:nvSpPr>
-          <p:cNvPr id="15" name="Shape 13"/>
+              <a:t>부딪힌 힘을 빛으로 내뿜습니다</a:t>
+            </a:r>
+            <a:endParaRPr lang="en-US" sz="1200" dirty="0"/>
+          </a:p>
+        </p:txBody>
+      </p:sp>
+      <p:sp>
+        <p:nvSpPr>
+          <p:cNvPr id="20" name="Text 18"/>
+          <p:cNvSpPr txBox="1"/>
+          <p:nvPr/>
+        </p:nvSpPr>
+        <p:spPr>
+          <a:xfrm>
+            <a:off x="731520" y="4343400"/>
+            <a:ext cx="10725912" cy="365760"/>
+          </a:xfrm>
+          <a:prstGeom prst="rect">
+            <a:avLst/>
+          </a:prstGeom>
+          <a:noFill/>
+          <a:ln/>
+        </p:spPr>
+        <p:txBody>
+          <a:bodyPr wrap="square" lIns="0" tIns="0" rIns="0" bIns="0" rtlCol="0" anchor="ctr"/>
+          <a:lstStyle/>
+          <a:p>
+            <a:pPr indent="0" marL="0">
+              <a:buNone/>
+            </a:pPr>
+            <a:r>
+              <a:rPr lang="en-US" sz="1300" dirty="0">
+                <a:solidFill>
+                  <a:srgbClr val="F4F6F8"/>
+                </a:solidFill>
+                <a:latin typeface="Malgun Gothic" pitchFamily="34" charset="0"/>
+                <a:ea typeface="Malgun Gothic" pitchFamily="34" charset="-122"/>
+                <a:cs typeface="Malgun Gothic" pitchFamily="34" charset="-120"/>
+              </a:rPr>
+              <a:t>네온사인이 기체마다 색이 다르듯, 오로라도 부딪히는 기체와 높이에 따라 색이 달라집니다</a:t>
+            </a:r>
+            <a:endParaRPr lang="en-US" sz="1300" dirty="0"/>
+          </a:p>
+        </p:txBody>
+      </p:sp>
+      <p:sp>
+        <p:nvSpPr>
+          <p:cNvPr id="21" name="Shape 19"/>
           <p:cNvSpPr/>
           <p:nvPr/>
         </p:nvSpPr>
         <p:spPr>
           <a:xfrm>
-            <a:off x="8229600" y="2029968"/>
-            <a:ext cx="457200" cy="457200"/>
+            <a:off x="731520" y="4846320"/>
+            <a:ext cx="3246120" cy="146304"/>
           </a:xfrm>
           <a:prstGeom prst="roundRect">
             <a:avLst>
-              <a:gd name="adj" fmla="val 20000"/>
+              <a:gd name="adj" fmla="val 50000"/>
             </a:avLst>
           </a:prstGeom>
           <a:solidFill>
@@ -8754,14 +9084,14 @@
       </p:sp>
       <p:sp>
         <p:nvSpPr>
-          <p:cNvPr id="16" name="Text 14"/>
-          <p:cNvSpPr txBox="1"/>
-          <p:nvPr/>
-        </p:nvSpPr>
-        <p:spPr>
-          <a:xfrm>
-            <a:off x="8869680" y="1920240"/>
-            <a:ext cx="2743200" cy="365760"/>
+          <p:cNvPr id="22" name="Text 20"/>
+          <p:cNvSpPr txBox="1"/>
+          <p:nvPr/>
+        </p:nvSpPr>
+        <p:spPr>
+          <a:xfrm>
+            <a:off x="731520" y="5074920"/>
+            <a:ext cx="3246120" cy="365760"/>
           </a:xfrm>
           <a:prstGeom prst="rect">
             <a:avLst/>
@@ -8777,7 +9107,7 @@
               <a:buNone/>
             </a:pPr>
             <a:r>
-              <a:rPr lang="en-US" sz="1600" b="1" dirty="0">
+              <a:rPr lang="en-US" sz="1500" b="1" dirty="0">
                 <a:solidFill>
                   <a:srgbClr val="F4F6F8"/>
                 </a:solidFill>
@@ -8787,20 +9117,20 @@
               </a:rPr>
               <a:t>초록</a:t>
             </a:r>
-            <a:endParaRPr lang="en-US" sz="1600" dirty="0"/>
-          </a:p>
-        </p:txBody>
-      </p:sp>
-      <p:sp>
-        <p:nvSpPr>
-          <p:cNvPr id="17" name="Text 15"/>
-          <p:cNvSpPr txBox="1"/>
-          <p:nvPr/>
-        </p:nvSpPr>
-        <p:spPr>
-          <a:xfrm>
-            <a:off x="8869680" y="2286000"/>
-            <a:ext cx="2926080" cy="365760"/>
+            <a:endParaRPr lang="en-US" sz="1500" dirty="0"/>
+          </a:p>
+        </p:txBody>
+      </p:sp>
+      <p:sp>
+        <p:nvSpPr>
+          <p:cNvPr id="23" name="Text 21"/>
+          <p:cNvSpPr txBox="1"/>
+          <p:nvPr/>
+        </p:nvSpPr>
+        <p:spPr>
+          <a:xfrm>
+            <a:off x="731520" y="5440680"/>
+            <a:ext cx="3246120" cy="320040"/>
           </a:xfrm>
           <a:prstGeom prst="rect">
             <a:avLst/>
@@ -8824,7 +9154,7 @@
                 <a:ea typeface="Malgun Gothic" pitchFamily="34" charset="-122"/>
                 <a:cs typeface="Malgun Gothic" pitchFamily="34" charset="-120"/>
               </a:rPr>
-              <a:t>산소, 100~150km. 가장 흔한 색</a:t>
+              <a:t>산소 · 100~150km · 가장 흔함</a:t>
             </a:r>
             <a:endParaRPr lang="en-US" sz="1100" dirty="0"/>
           </a:p>
@@ -8832,18 +9162,18 @@
       </p:sp>
       <p:sp>
         <p:nvSpPr>
-          <p:cNvPr id="18" name="Shape 16"/>
+          <p:cNvPr id="24" name="Shape 22"/>
           <p:cNvSpPr/>
           <p:nvPr/>
         </p:nvSpPr>
         <p:spPr>
           <a:xfrm>
-            <a:off x="8229600" y="2898648"/>
-            <a:ext cx="457200" cy="457200"/>
+            <a:off x="4343400" y="4846320"/>
+            <a:ext cx="3246120" cy="146304"/>
           </a:xfrm>
           <a:prstGeom prst="roundRect">
             <a:avLst>
-              <a:gd name="adj" fmla="val 20000"/>
+              <a:gd name="adj" fmla="val 50000"/>
             </a:avLst>
           </a:prstGeom>
           <a:solidFill>
@@ -8859,14 +9189,14 @@
       </p:sp>
       <p:sp>
         <p:nvSpPr>
-          <p:cNvPr id="19" name="Text 17"/>
-          <p:cNvSpPr txBox="1"/>
-          <p:nvPr/>
-        </p:nvSpPr>
-        <p:spPr>
-          <a:xfrm>
-            <a:off x="8869680" y="2788920"/>
-            <a:ext cx="2743200" cy="365760"/>
+          <p:cNvPr id="25" name="Text 23"/>
+          <p:cNvSpPr txBox="1"/>
+          <p:nvPr/>
+        </p:nvSpPr>
+        <p:spPr>
+          <a:xfrm>
+            <a:off x="4343400" y="5074920"/>
+            <a:ext cx="3246120" cy="365760"/>
           </a:xfrm>
           <a:prstGeom prst="rect">
             <a:avLst/>
@@ -8882,7 +9212,7 @@
               <a:buNone/>
             </a:pPr>
             <a:r>
-              <a:rPr lang="en-US" sz="1600" b="1" dirty="0">
+              <a:rPr lang="en-US" sz="1500" b="1" dirty="0">
                 <a:solidFill>
                   <a:srgbClr val="F4F6F8"/>
                 </a:solidFill>
@@ -8892,20 +9222,20 @@
               </a:rPr>
               <a:t>빨강</a:t>
             </a:r>
-            <a:endParaRPr lang="en-US" sz="1600" dirty="0"/>
-          </a:p>
-        </p:txBody>
-      </p:sp>
-      <p:sp>
-        <p:nvSpPr>
-          <p:cNvPr id="20" name="Text 18"/>
-          <p:cNvSpPr txBox="1"/>
-          <p:nvPr/>
-        </p:nvSpPr>
-        <p:spPr>
-          <a:xfrm>
-            <a:off x="8869680" y="3154680"/>
-            <a:ext cx="2926080" cy="365760"/>
+            <a:endParaRPr lang="en-US" sz="1500" dirty="0"/>
+          </a:p>
+        </p:txBody>
+      </p:sp>
+      <p:sp>
+        <p:nvSpPr>
+          <p:cNvPr id="26" name="Text 24"/>
+          <p:cNvSpPr txBox="1"/>
+          <p:nvPr/>
+        </p:nvSpPr>
+        <p:spPr>
+          <a:xfrm>
+            <a:off x="4343400" y="5440680"/>
+            <a:ext cx="3246120" cy="320040"/>
           </a:xfrm>
           <a:prstGeom prst="rect">
             <a:avLst/>
@@ -8929,7 +9259,7 @@
                 <a:ea typeface="Malgun Gothic" pitchFamily="34" charset="-122"/>
                 <a:cs typeface="Malgun Gothic" pitchFamily="34" charset="-120"/>
               </a:rPr>
-              <a:t>산소, 200km 이상. 아주 강할 때 위쪽에</a:t>
+              <a:t>산소 · 200km 이상 · 아주 강할 때</a:t>
             </a:r>
             <a:endParaRPr lang="en-US" sz="1100" dirty="0"/>
           </a:p>
@@ -8937,18 +9267,18 @@
       </p:sp>
       <p:sp>
         <p:nvSpPr>
-          <p:cNvPr id="21" name="Shape 19"/>
+          <p:cNvPr id="27" name="Shape 25"/>
           <p:cNvSpPr/>
           <p:nvPr/>
         </p:nvSpPr>
         <p:spPr>
           <a:xfrm>
-            <a:off x="8229600" y="3767328"/>
-            <a:ext cx="457200" cy="457200"/>
+            <a:off x="7955280" y="4846320"/>
+            <a:ext cx="3246120" cy="146304"/>
           </a:xfrm>
           <a:prstGeom prst="roundRect">
             <a:avLst>
-              <a:gd name="adj" fmla="val 20000"/>
+              <a:gd name="adj" fmla="val 50000"/>
             </a:avLst>
           </a:prstGeom>
           <a:solidFill>
@@ -8964,14 +9294,14 @@
       </p:sp>
       <p:sp>
         <p:nvSpPr>
-          <p:cNvPr id="22" name="Text 20"/>
-          <p:cNvSpPr txBox="1"/>
-          <p:nvPr/>
-        </p:nvSpPr>
-        <p:spPr>
-          <a:xfrm>
-            <a:off x="8869680" y="3657600"/>
-            <a:ext cx="2743200" cy="365760"/>
+          <p:cNvPr id="28" name="Text 26"/>
+          <p:cNvSpPr txBox="1"/>
+          <p:nvPr/>
+        </p:nvSpPr>
+        <p:spPr>
+          <a:xfrm>
+            <a:off x="7955280" y="5074920"/>
+            <a:ext cx="3246120" cy="365760"/>
           </a:xfrm>
           <a:prstGeom prst="rect">
             <a:avLst/>
@@ -8987,7 +9317,7 @@
               <a:buNone/>
             </a:pPr>
             <a:r>
-              <a:rPr lang="en-US" sz="1600" b="1" dirty="0">
+              <a:rPr lang="en-US" sz="1500" b="1" dirty="0">
                 <a:solidFill>
                   <a:srgbClr val="F4F6F8"/>
                 </a:solidFill>
@@ -8997,20 +9327,20 @@
               </a:rPr>
               <a:t>보라·파랑</a:t>
             </a:r>
-            <a:endParaRPr lang="en-US" sz="1600" dirty="0"/>
-          </a:p>
-        </p:txBody>
-      </p:sp>
-      <p:sp>
-        <p:nvSpPr>
-          <p:cNvPr id="23" name="Text 21"/>
-          <p:cNvSpPr txBox="1"/>
-          <p:nvPr/>
-        </p:nvSpPr>
-        <p:spPr>
-          <a:xfrm>
-            <a:off x="8869680" y="4023360"/>
-            <a:ext cx="2926080" cy="365760"/>
+            <a:endParaRPr lang="en-US" sz="1500" dirty="0"/>
+          </a:p>
+        </p:txBody>
+      </p:sp>
+      <p:sp>
+        <p:nvSpPr>
+          <p:cNvPr id="29" name="Text 27"/>
+          <p:cNvSpPr txBox="1"/>
+          <p:nvPr/>
+        </p:nvSpPr>
+        <p:spPr>
+          <a:xfrm>
+            <a:off x="7955280" y="5440680"/>
+            <a:ext cx="3246120" cy="320040"/>
           </a:xfrm>
           <a:prstGeom prst="rect">
             <a:avLst/>
@@ -9034,7 +9364,7 @@
                 <a:ea typeface="Malgun Gothic" pitchFamily="34" charset="-122"/>
                 <a:cs typeface="Malgun Gothic" pitchFamily="34" charset="-120"/>
               </a:rPr>
-              <a:t>질소. 커튼 아랫단에 잠깐</a:t>
+              <a:t>질소 · 커튼 아랫단에 잠깐</a:t>
             </a:r>
             <a:endParaRPr lang="en-US" sz="1100" dirty="0"/>
           </a:p>
@@ -9042,14 +9372,14 @@
       </p:sp>
       <p:sp>
         <p:nvSpPr>
-          <p:cNvPr id="24" name="Text 22"/>
-          <p:cNvSpPr txBox="1"/>
-          <p:nvPr/>
-        </p:nvSpPr>
-        <p:spPr>
-          <a:xfrm>
-            <a:off x="731520" y="5257800"/>
-            <a:ext cx="10698480" cy="457200"/>
+          <p:cNvPr id="30" name="Text 28"/>
+          <p:cNvSpPr txBox="1"/>
+          <p:nvPr/>
+        </p:nvSpPr>
+        <p:spPr>
+          <a:xfrm>
+            <a:off x="731520" y="5989320"/>
+            <a:ext cx="10725912" cy="365760"/>
           </a:xfrm>
           <a:prstGeom prst="rect">
             <a:avLst/>
@@ -9065,45 +9395,6 @@
               <a:buNone/>
             </a:pPr>
             <a:r>
-              <a:rPr lang="en-US" sz="1400" dirty="0">
-                <a:solidFill>
-                  <a:srgbClr val="F4F6F8"/>
-                </a:solidFill>
-                <a:latin typeface="Malgun Gothic" pitchFamily="34" charset="0"/>
-                <a:ea typeface="Malgun Gothic" pitchFamily="34" charset="-122"/>
-                <a:cs typeface="Malgun Gothic" pitchFamily="34" charset="-120"/>
-              </a:rPr>
-              <a:t>태양 활동은 11년 주기. 2024~2026년이 이번 주기의 극대기이고, 올해 초는 그 한가운데였습니다.</a:t>
-            </a:r>
-            <a:endParaRPr lang="en-US" sz="1400" dirty="0"/>
-          </a:p>
-        </p:txBody>
-      </p:sp>
-      <p:sp>
-        <p:nvSpPr>
-          <p:cNvPr id="25" name="Text 23"/>
-          <p:cNvSpPr txBox="1"/>
-          <p:nvPr/>
-        </p:nvSpPr>
-        <p:spPr>
-          <a:xfrm>
-            <a:off x="731520" y="5715000"/>
-            <a:ext cx="10698480" cy="365760"/>
-          </a:xfrm>
-          <a:prstGeom prst="rect">
-            <a:avLst/>
-          </a:prstGeom>
-          <a:noFill/>
-          <a:ln/>
-        </p:spPr>
-        <p:txBody>
-          <a:bodyPr wrap="square" lIns="0" tIns="0" rIns="0" bIns="0" rtlCol="0" anchor="ctr"/>
-          <a:lstStyle/>
-          <a:p>
-            <a:pPr indent="0" marL="0">
-              <a:buNone/>
-            </a:pPr>
-            <a:r>
               <a:rPr lang="en-US" sz="1200" dirty="0">
                 <a:solidFill>
                   <a:srgbClr val="A9B4C2"/>
@@ -9112,7 +9403,7 @@
                 <a:ea typeface="Malgun Gothic" pitchFamily="34" charset="-122"/>
                 <a:cs typeface="Malgun Gothic" pitchFamily="34" charset="-120"/>
               </a:rPr>
-              <a:t>색은 부딪히는 기체와 높이로 정해집니다.</a:t>
+              <a:t>지금이 좋은 때: 태양 활동은 11년 주기이고 2024~2026년이 극대기입니다. 올해 초는 그 한가운데였습니다.</a:t>
             </a:r>
             <a:endParaRPr lang="en-US" sz="1200" dirty="0"/>
           </a:p>
